--- a/docs/교재/실전반/07일차/실전반_07일차.pptx
+++ b/docs/교재/실전반/07일차/실전반_07일차.pptx
@@ -7125,7 +7125,7 @@
       </p:sp>
       <p:pic>
         <p:nvPicPr>
-          <p:cNvPr id="6" name="삽화:세흐름_나란히.svg" descr="illust_2511669338288009322_1791743711.png"/>
+          <p:cNvPr id="6" name="삽화:세흐름_나란히.svg" descr="illust_3666157119745958476_1791743711.png"/>
           <p:cNvPicPr>
             <a:picLocks noChangeAspect="1"/>
           </p:cNvPicPr>
@@ -8611,7 +8611,7 @@
       </p:sp>
       <p:pic>
         <p:nvPicPr>
-          <p:cNvPr id="6" name="삽화:승인블록_자리.svg" descr="illust_177633726683486668_1791743711.png"/>
+          <p:cNvPr id="6" name="삽화:승인블록_자리.svg" descr="illust_2916381246029964612_1791743711.png"/>
           <p:cNvPicPr>
             <a:picLocks noChangeAspect="1"/>
           </p:cNvPicPr>
@@ -9542,7 +9542,7 @@
       </p:sp>
       <p:pic>
         <p:nvPicPr>
-          <p:cNvPr id="6" name="삽화:흐름_정기점검.svg" descr="illust_2263952123176121761_1791743711.png"/>
+          <p:cNvPr id="6" name="삽화:흐름_정기점검.svg" descr="illust_370046858641430152_1791743711.png"/>
           <p:cNvPicPr>
             <a:picLocks noChangeAspect="1"/>
           </p:cNvPicPr>
@@ -9909,7 +9909,7 @@
         <p:spPr>
           <a:xfrm>
             <a:off x="4623065" y="4085904"/>
-            <a:ext cx="1309139" cy="755522"/>
+            <a:ext cx="1309139" cy="546353"/>
           </a:xfrm>
           <a:prstGeom prst="rect">
             <a:avLst/>
@@ -9937,7 +9937,7 @@
                 <a:ea typeface="맑은 고딕"/>
                 <a:cs typeface="맑은 고딕"/>
               </a:rPr>
-              <a:t>정비 오더 등록 · 공지 메일</a:t>
+              <a:t>정비 오더 · 공지 메일</a:t>
             </a:r>
           </a:p>
         </p:txBody>
@@ -10431,7 +10431,7 @@
       </p:sp>
       <p:pic>
         <p:nvPicPr>
-          <p:cNvPr id="6" name="삽화:흐름_재고보충.svg" descr="illust_6934482191357024567_1791743711.png"/>
+          <p:cNvPr id="6" name="삽화:흐름_재고보충.svg" descr="illust_8492217545615126155_1791743711.png"/>
           <p:cNvPicPr>
             <a:picLocks noChangeAspect="1"/>
           </p:cNvPicPr>
@@ -24994,7 +24994,7 @@
       </p:sp>
       <p:pic>
         <p:nvPicPr>
-          <p:cNvPr id="6" name="삽화:요소_복습.svg" descr="illust_1819152184610333649_1791743711.png"/>
+          <p:cNvPr id="6" name="삽화:요소_복습.svg" descr="illust_9147764396641068662_1791743711.png"/>
           <p:cNvPicPr>
             <a:picLocks noChangeAspect="1"/>
           </p:cNvPicPr>
@@ -25820,7 +25820,7 @@
       </p:sp>
       <p:pic>
         <p:nvPicPr>
-          <p:cNvPr id="6" name="삽화:다섯자리.svg" descr="illust_6356779472614882450_1791743711.png"/>
+          <p:cNvPr id="6" name="삽화:다섯자리.svg" descr="illust_3797123937605621389_1791743711.png"/>
           <p:cNvPicPr>
             <a:picLocks noChangeAspect="1"/>
           </p:cNvPicPr>
@@ -26394,7 +26394,7 @@
       </p:sp>
       <p:pic>
         <p:nvPicPr>
-          <p:cNvPr id="6" name="삽화:주고받는것.svg" descr="illust_3217685017818079939_1791743711.png"/>
+          <p:cNvPr id="6" name="삽화:주고받는것.svg" descr="illust_1641365242469120374_1791743711.png"/>
           <p:cNvPicPr>
             <a:picLocks noChangeAspect="1"/>
           </p:cNvPicPr>
@@ -30298,7 +30298,7 @@
       </p:sp>
       <p:pic>
         <p:nvPicPr>
-          <p:cNvPr id="6" name="삽화:세종료.svg" descr="illust_7474625002109322000_1791743711.png"/>
+          <p:cNvPr id="6" name="삽화:세종료.svg" descr="illust_7835938662855528442_1791743711.png"/>
           <p:cNvPicPr>
             <a:picLocks noChangeAspect="1"/>
           </p:cNvPicPr>
@@ -32455,7 +32455,7 @@
       </p:sp>
       <p:pic>
         <p:nvPicPr>
-          <p:cNvPr id="6" name="삽화:세층연결.svg" descr="illust_1499651971919782305_1791743711.png"/>
+          <p:cNvPr id="6" name="삽화:세층연결.svg" descr="illust_8703608070057469281_1791743711.png"/>
           <p:cNvPicPr>
             <a:picLocks noChangeAspect="1"/>
           </p:cNvPicPr>
@@ -41769,7 +41769,7 @@
       </p:sp>
       <p:pic>
         <p:nvPicPr>
-          <p:cNvPr id="6" name="삽화:세시작.svg" descr="illust_4865235967977852563_1791743711.png"/>
+          <p:cNvPr id="6" name="삽화:세시작.svg" descr="illust_983615166974649375_1791743711.png"/>
           <p:cNvPicPr>
             <a:picLocks noChangeAspect="1"/>
           </p:cNvPicPr>
@@ -46287,7 +46287,7 @@
       </p:sp>
       <p:pic>
         <p:nvPicPr>
-          <p:cNvPr id="6" name="삽화:운전시간.svg" descr="illust_2959855554358765816_1791743711.png"/>
+          <p:cNvPr id="6" name="삽화:운전시간.svg" descr="illust_2758057438126755451_1791743711.png"/>
           <p:cNvPicPr>
             <a:picLocks noChangeAspect="1"/>
           </p:cNvPicPr>
@@ -46798,7 +46798,7 @@
       </p:sp>
       <p:pic>
         <p:nvPicPr>
-          <p:cNvPr id="6" name="삽화:재고.svg" descr="illust_5388632269344830594_1791743711.png"/>
+          <p:cNvPr id="6" name="삽화:재고.svg" descr="illust_4419532468837128668_1791743711.png"/>
           <p:cNvPicPr>
             <a:picLocks noChangeAspect="1"/>
           </p:cNvPicPr>

--- a/docs/교재/실전반/07일차/실전반_07일차.pptx
+++ b/docs/교재/실전반/07일차/실전반_07일차.pptx
@@ -3353,7 +3353,7 @@
           <a:lstStyle/>
           <a:p>
             <a:r>
-              <a:t>달라지는 네 가지를 보았으니 이제 같은 것을 보겠습니다. 위에서부터 긴급 대응, 정기 점검, 재고 보충의 뼈대입니다. 세 줄 모두 경보로 시작해 에이전트가 제안하고, 사람이 승인하거나 거절하고, 시스템이 처리한 뒤 결과를 보고합니다. 하늘색 띠 안의 승인 작업과 갈림은 세 줄이 같은 자리, 같은 모양입니다. 달라지는 것은 띠의 오른쪽에 이어지는 시스템 작업의 수와 내용입니다.</a:t>
+              <a:t>달라지는 네 가지를 보았으니 이제 같은 것을 보겠습니다. 위에서부터 긴급 대응, 정기 점검, 재고 보충의 뼈대입니다. 세 줄 모두 경보로 시작해 에이전트가 제안하고, 사람이 승인하거나 거절하고, 시스템이 처리한 뒤 결과를 보고합니다. 하늘색 띠 안의 승인 작업과 갈림은 세 줄이 같은 자리, 같은 모양이어서 같은 승인 블록이라고 적었습니다. 달라지는 것은 띠의 오른쪽에 이어지는 시스템 작업의 수와 내용입니다.</a:t>
             </a:r>
           </a:p>
         </p:txBody>
@@ -7125,7 +7125,7 @@
       </p:sp>
       <p:pic>
         <p:nvPicPr>
-          <p:cNvPr id="6" name="삽화:세흐름_나란히.svg" descr="illust_3666157119745958476_1791743711.png"/>
+          <p:cNvPr id="6" name="삽화:세흐름_나란히.svg" descr="illust_4575290802423977779_1791743711.png"/>
           <p:cNvPicPr>
             <a:picLocks noChangeAspect="1"/>
           </p:cNvPicPr>
@@ -8611,7 +8611,7 @@
       </p:sp>
       <p:pic>
         <p:nvPicPr>
-          <p:cNvPr id="6" name="삽화:승인블록_자리.svg" descr="illust_2916381246029964612_1791743711.png"/>
+          <p:cNvPr id="6" name="삽화:승인블록_자리.svg" descr="illust_50187781467633666_1791743711.png"/>
           <p:cNvPicPr>
             <a:picLocks noChangeAspect="1"/>
           </p:cNvPicPr>
@@ -9542,7 +9542,7 @@
       </p:sp>
       <p:pic>
         <p:nvPicPr>
-          <p:cNvPr id="6" name="삽화:흐름_정기점검.svg" descr="illust_370046858641430152_1791743711.png"/>
+          <p:cNvPr id="6" name="삽화:흐름_정기점검.svg" descr="illust_251757359326511007_1791743711.png"/>
           <p:cNvPicPr>
             <a:picLocks noChangeAspect="1"/>
           </p:cNvPicPr>
@@ -10431,7 +10431,7 @@
       </p:sp>
       <p:pic>
         <p:nvPicPr>
-          <p:cNvPr id="6" name="삽화:흐름_재고보충.svg" descr="illust_8492217545615126155_1791743711.png"/>
+          <p:cNvPr id="6" name="삽화:흐름_재고보충.svg" descr="illust_815649500765716954_1791743711.png"/>
           <p:cNvPicPr>
             <a:picLocks noChangeAspect="1"/>
           </p:cNvPicPr>
@@ -24994,7 +24994,7 @@
       </p:sp>
       <p:pic>
         <p:nvPicPr>
-          <p:cNvPr id="6" name="삽화:요소_복습.svg" descr="illust_9147764396641068662_1791743711.png"/>
+          <p:cNvPr id="6" name="삽화:요소_복습.svg" descr="illust_2100999706586986_1791743711.png"/>
           <p:cNvPicPr>
             <a:picLocks noChangeAspect="1"/>
           </p:cNvPicPr>
@@ -25820,7 +25820,7 @@
       </p:sp>
       <p:pic>
         <p:nvPicPr>
-          <p:cNvPr id="6" name="삽화:다섯자리.svg" descr="illust_3797123937605621389_1791743711.png"/>
+          <p:cNvPr id="6" name="삽화:다섯자리.svg" descr="illust_1416529868566961278_1791743711.png"/>
           <p:cNvPicPr>
             <a:picLocks noChangeAspect="1"/>
           </p:cNvPicPr>
@@ -26394,7 +26394,7 @@
       </p:sp>
       <p:pic>
         <p:nvPicPr>
-          <p:cNvPr id="6" name="삽화:주고받는것.svg" descr="illust_1641365242469120374_1791743711.png"/>
+          <p:cNvPr id="6" name="삽화:주고받는것.svg" descr="illust_4510420154053857483_1791743711.png"/>
           <p:cNvPicPr>
             <a:picLocks noChangeAspect="1"/>
           </p:cNvPicPr>
@@ -30298,7 +30298,7 @@
       </p:sp>
       <p:pic>
         <p:nvPicPr>
-          <p:cNvPr id="6" name="삽화:세종료.svg" descr="illust_7835938662855528442_1791743711.png"/>
+          <p:cNvPr id="6" name="삽화:세종료.svg" descr="illust_2290073128926838632_1791743711.png"/>
           <p:cNvPicPr>
             <a:picLocks noChangeAspect="1"/>
           </p:cNvPicPr>
@@ -32455,7 +32455,7 @@
       </p:sp>
       <p:pic>
         <p:nvPicPr>
-          <p:cNvPr id="6" name="삽화:세층연결.svg" descr="illust_8703608070057469281_1791743711.png"/>
+          <p:cNvPr id="6" name="삽화:세층연결.svg" descr="illust_2261027242761792376_1791743711.png"/>
           <p:cNvPicPr>
             <a:picLocks noChangeAspect="1"/>
           </p:cNvPicPr>
@@ -34462,7 +34462,7 @@
                 <a:ea typeface="맑은 고딕"/>
                 <a:cs typeface="맑은 고딕"/>
               </a:rPr>
-              <a:t>쿨러 핀 오염으로 가려</a:t>
+              <a:t>쿨러 핀 오염으로</a:t>
             </a:r>
           </a:p>
           <a:p>
@@ -34483,7 +34483,7 @@
                 <a:ea typeface="맑은 고딕"/>
                 <a:cs typeface="맑은 고딕"/>
               </a:rPr>
-              <a:t>이 조치를 추천한다</a:t>
+              <a:t>가려 추천한다</a:t>
             </a:r>
           </a:p>
         </p:txBody>
@@ -34856,7 +34856,7 @@
                 <a:ea typeface="맑은 고딕"/>
                 <a:cs typeface="맑은 고딕"/>
               </a:rPr>
-              <a:t>팬 속도 100 % 명령</a:t>
+              <a:t>프로세스가</a:t>
             </a:r>
           </a:p>
           <a:p>
@@ -34877,7 +34877,28 @@
                 <a:ea typeface="맑은 고딕"/>
                 <a:cs typeface="맑은 고딕"/>
               </a:rPr>
-              <a:t>CMD-1010-0001-01d1</a:t>
+              <a:t>팬 속도 100 %</a:t>
+            </a:r>
+          </a:p>
+          <a:p>
+            <a:pPr algn="ctr">
+              <a:lnSpc>
+                <a:spcPct val="110000"/>
+              </a:lnSpc>
+              <a:spcAft>
+                <a:spcPts val="400"/>
+              </a:spcAft>
+            </a:pPr>
+            <a:r>
+              <a:rPr sz="1250" b="0">
+                <a:solidFill>
+                  <a:srgbClr val="1F2A3A"/>
+                </a:solidFill>
+                <a:latin typeface="맑은 고딕"/>
+                <a:ea typeface="맑은 고딕"/>
+                <a:cs typeface="맑은 고딕"/>
+              </a:rPr>
+              <a:t>명령을 낸다</a:t>
             </a:r>
           </a:p>
         </p:txBody>
@@ -41769,7 +41790,7 @@
       </p:sp>
       <p:pic>
         <p:nvPicPr>
-          <p:cNvPr id="6" name="삽화:세시작.svg" descr="illust_983615166974649375_1791743711.png"/>
+          <p:cNvPr id="6" name="삽화:세시작.svg" descr="illust_567010194603932106_1791743711.png"/>
           <p:cNvPicPr>
             <a:picLocks noChangeAspect="1"/>
           </p:cNvPicPr>
@@ -43551,7 +43572,7 @@
                 <a:ea typeface="맑은 고딕"/>
                 <a:cs typeface="맑은 고딕"/>
               </a:rPr>
-              <a:t>설비를 세우는 정비 오더는 효과를 내는 작업이므로 설비보전팀장의 승인 뒤에 둔다</a:t>
+              <a:t>정비 오더는 효과를 내는 작업이므로 설비보전팀장의 승인 뒤에 둔다</a:t>
             </a:r>
           </a:p>
         </p:txBody>
@@ -46287,7 +46308,7 @@
       </p:sp>
       <p:pic>
         <p:nvPicPr>
-          <p:cNvPr id="6" name="삽화:운전시간.svg" descr="illust_2758057438126755451_1791743711.png"/>
+          <p:cNvPr id="6" name="삽화:운전시간.svg" descr="illust_1076619142239359474_1791743711.png"/>
           <p:cNvPicPr>
             <a:picLocks noChangeAspect="1"/>
           </p:cNvPicPr>
@@ -46798,7 +46819,7 @@
       </p:sp>
       <p:pic>
         <p:nvPicPr>
-          <p:cNvPr id="6" name="삽화:재고.svg" descr="illust_4419532468837128668_1791743711.png"/>
+          <p:cNvPr id="6" name="삽화:재고.svg" descr="illust_7437322477737670892_1791743711.png"/>
           <p:cNvPicPr>
             <a:picLocks noChangeAspect="1"/>
           </p:cNvPicPr>

--- a/docs/교재/실전반/07일차/실전반_07일차.pptx
+++ b/docs/교재/실전반/07일차/실전반_07일차.pptx
@@ -7196,7 +7196,7 @@
       </p:sp>
       <p:pic>
         <p:nvPicPr>
-          <p:cNvPr id="6" name="삽화:세흐름_나란히.svg" descr="illust_1288324656185082599_1791743711.png"/>
+          <p:cNvPr id="6" name="삽화:세흐름_나란히.svg" descr="illust_6224294310663101535_1791772944.png"/>
           <p:cNvPicPr>
             <a:picLocks noChangeAspect="1"/>
           </p:cNvPicPr>
@@ -8682,7 +8682,7 @@
       </p:sp>
       <p:pic>
         <p:nvPicPr>
-          <p:cNvPr id="6" name="삽화:승인블록_자리.svg" descr="illust_1253979401244194265_1791743711.png"/>
+          <p:cNvPr id="6" name="삽화:승인블록_자리.svg" descr="illust_6584102900646121337_1791772944.png"/>
           <p:cNvPicPr>
             <a:picLocks noChangeAspect="1"/>
           </p:cNvPicPr>
@@ -9613,7 +9613,7 @@
       </p:sp>
       <p:pic>
         <p:nvPicPr>
-          <p:cNvPr id="6" name="삽화:흐름_정기점검.svg" descr="illust_7505691705944426730_1791743711.png"/>
+          <p:cNvPr id="6" name="삽화:흐름_정기점검.svg" descr="illust_2351703321306601636_1791772944.png"/>
           <p:cNvPicPr>
             <a:picLocks noChangeAspect="1"/>
           </p:cNvPicPr>
@@ -10502,7 +10502,7 @@
       </p:sp>
       <p:pic>
         <p:nvPicPr>
-          <p:cNvPr id="6" name="삽화:흐름_재고보충.svg" descr="illust_1921942848382756195_1791743711.png"/>
+          <p:cNvPr id="6" name="삽화:흐름_재고보충.svg" descr="illust_8412877352476810512_1791772944.png"/>
           <p:cNvPicPr>
             <a:picLocks noChangeAspect="1"/>
           </p:cNvPicPr>
@@ -25083,7 +25083,7 @@
       </p:sp>
       <p:pic>
         <p:nvPicPr>
-          <p:cNvPr id="6" name="삽화:요소_복습.svg" descr="illust_6662642318904048888_1791743711.png"/>
+          <p:cNvPr id="6" name="삽화:요소_복습.svg" descr="illust_690560068654882871_1791772944.png"/>
           <p:cNvPicPr>
             <a:picLocks noChangeAspect="1"/>
           </p:cNvPicPr>
@@ -25909,7 +25909,7 @@
       </p:sp>
       <p:pic>
         <p:nvPicPr>
-          <p:cNvPr id="6" name="삽화:다섯자리.svg" descr="illust_8553891043291061113_1791743711.png"/>
+          <p:cNvPr id="6" name="삽화:다섯자리.svg" descr="illust_6130152366728270621_1791772944.png"/>
           <p:cNvPicPr>
             <a:picLocks noChangeAspect="1"/>
           </p:cNvPicPr>
@@ -26504,7 +26504,7 @@
       </p:sp>
       <p:pic>
         <p:nvPicPr>
-          <p:cNvPr id="6" name="삽화:주고받는것.svg" descr="illust_803601862498136657_1791743711.png"/>
+          <p:cNvPr id="6" name="삽화:주고받는것.svg" descr="illust_4704347752171512838_1791772944.png"/>
           <p:cNvPicPr>
             <a:picLocks noChangeAspect="1"/>
           </p:cNvPicPr>
@@ -32210,7 +32210,7 @@
       </p:sp>
       <p:pic>
         <p:nvPicPr>
-          <p:cNvPr id="6" name="삽화:세종료.svg" descr="illust_8589226067637688089_1791743711.png"/>
+          <p:cNvPr id="6" name="삽화:세종료.svg" descr="illust_8467281102102632270_1791772944.png"/>
           <p:cNvPicPr>
             <a:picLocks noChangeAspect="1"/>
           </p:cNvPicPr>
@@ -33849,7 +33849,7 @@
       </p:sp>
       <p:pic>
         <p:nvPicPr>
-          <p:cNvPr id="6" name="삽화:세층연결.svg" descr="illust_5867195685462896020_1791743711.png"/>
+          <p:cNvPr id="6" name="삽화:세층연결.svg" descr="illust_2801936107130908534_1791772944.png"/>
           <p:cNvPicPr>
             <a:picLocks noChangeAspect="1"/>
           </p:cNvPicPr>
@@ -41912,7 +41912,7 @@
                 <a:ea typeface="맑은 고딕"/>
                 <a:cs typeface="맑은 고딕"/>
               </a:rPr>
-              <a:t>배운 내용을 바탕으로 정답을 맞춰보세요.</a:t>
+              <a:t>배운 내용을 바탕으로 정답을 맞혀 보세요.</a:t>
             </a:r>
           </a:p>
         </p:txBody>
@@ -42091,7 +42091,7 @@
       </p:sp>
       <p:pic>
         <p:nvPicPr>
-          <p:cNvPr id="6" name="삽화:세시작.svg" descr="illust_8141876567404953159_1791743711.png"/>
+          <p:cNvPr id="6" name="삽화:세시작.svg" descr="illust_6412567775465709734_1791772944.png"/>
           <p:cNvPicPr>
             <a:picLocks noChangeAspect="1"/>
           </p:cNvPicPr>
@@ -47403,7 +47403,7 @@
       </p:sp>
       <p:pic>
         <p:nvPicPr>
-          <p:cNvPr id="6" name="삽화:운전시간.svg" descr="illust_4785132132801811037_1791743711.png"/>
+          <p:cNvPr id="6" name="삽화:운전시간.svg" descr="illust_7966131781677155841_1791772944.png"/>
           <p:cNvPicPr>
             <a:picLocks noChangeAspect="1"/>
           </p:cNvPicPr>
@@ -47914,7 +47914,7 @@
       </p:sp>
       <p:pic>
         <p:nvPicPr>
-          <p:cNvPr id="6" name="삽화:재고.svg" descr="illust_4589866147008531048_1791743711.png"/>
+          <p:cNvPr id="6" name="삽화:재고.svg" descr="illust_6510342808224526697_1791772944.png"/>
           <p:cNvPicPr>
             <a:picLocks noChangeAspect="1"/>
           </p:cNvPicPr>

--- a/docs/교재/실전반/07일차/실전반_07일차.pptx
+++ b/docs/교재/실전반/07일차/실전반_07일차.pptx
@@ -624,7 +624,7 @@
           <a:lstStyle/>
           <a:p>
             <a:r>
-              <a:t>승인 블록을 다시 써서 그린 정기 점검 프로세스입니다. 하늘색 요소는 긴급 대응 프로세스의 승인 블록과 같고, 승인 역할만 설비보전팀장으로 바뀌었습니다. 새로 그린 것은 흰 요소 넷입니다. 정기 점검 요청이라는 시작 이벤트, 에이전트의 정비 계획 제안, 그리고 승인 뒤의 정비 오더 등록 · 공지 메일과 결과 보고입니다. 작업은 여섯, 게이트웨이는 하나, 끝 이벤트는 셋입니다.</a:t>
+              <a:t>정기 점검 프로세스의 전체 그림입니다. 하늘색 요소는 긴급 대응 프로세스의 승인 블록과 같고, 승인 역할만 설비보전팀장으로 바뀌었습니다. 이 프로세스에서 달라진 것은 흰 요소 넷입니다. 정기 점검 요청이라는 시작 이벤트, 에이전트의 정비 계획 제안, 그리고 승인 뒤의 정비 오더 등록 · 공지 메일과 결과 보고입니다. 작업은 여섯, 게이트웨이는 하나, 끝 이벤트는 셋입니다.</a:t>
             </a:r>
           </a:p>
         </p:txBody>
@@ -694,7 +694,7 @@
           <a:lstStyle/>
           <a:p>
             <a:r>
-              <a:t>재고 보충 프로세스도 같은 방법으로 그립니다. 하늘색 승인 블록은 그대로이고 승인 역할이 구매 담당입니다. 승인 뒤에는 ERP 발주 · 공급사 메일, 입고 · 재고 반영, 결과 보고의 세 작업이 이어집니다. 정기 점검보다 시스템 작업이 하나 많아 작업은 일곱입니다. 두 그림을 견주면 승인 블록의 오른쪽에 무엇을 잇느냐만 다릅니다.</a:t>
+              <a:t>재고 보충 프로세스도 같은 구조입니다. 하늘색 승인 블록은 그대로이고 승인 역할이 구매 담당입니다. 승인 뒤에는 ERP 발주 · 공급사 메일, 입고 · 재고 반영, 결과 보고의 세 작업이 이어집니다. 정기 점검보다 시스템 작업이 하나 많아 작업은 일곱입니다. 두 그림을 견주면 승인 블록의 오른쪽에 이어지는 작업만 다릅니다.</a:t>
             </a:r>
           </a:p>
         </p:txBody>
@@ -7196,7 +7196,7 @@
       </p:sp>
       <p:pic>
         <p:nvPicPr>
-          <p:cNvPr id="6" name="삽화:세흐름_나란히.svg" descr="illust_6224294310663101535_1791772944.png"/>
+          <p:cNvPr id="6" name="삽화:세흐름_나란히.svg" descr="illust_3515042674630700489_1791772944.png"/>
           <p:cNvPicPr>
             <a:picLocks noChangeAspect="1"/>
           </p:cNvPicPr>
@@ -8682,7 +8682,7 @@
       </p:sp>
       <p:pic>
         <p:nvPicPr>
-          <p:cNvPr id="6" name="삽화:승인블록_자리.svg" descr="illust_6584102900646121337_1791772944.png"/>
+          <p:cNvPr id="6" name="삽화:승인블록_자리.svg" descr="illust_3800709478000724647_1791772944.png"/>
           <p:cNvPicPr>
             <a:picLocks noChangeAspect="1"/>
           </p:cNvPicPr>
@@ -9538,7 +9538,7 @@
                 <a:ea typeface="맑은 고딕"/>
                 <a:cs typeface="맑은 고딕"/>
               </a:rPr>
-              <a:t>정기 점검 프로세스는 승인 블록을 그대로 쓰고, 시작 이벤트와 제안 작업과 승인 뒤의 작업 둘만 새로 그린 것이다.</a:t>
+              <a:t>정기 점검 프로세스는 승인 블록이 긴급 대응과 같고, 시작 이벤트와 제안 작업과 승인 뒤의 작업 둘만 다르다.</a:t>
             </a:r>
           </a:p>
         </p:txBody>
@@ -9613,7 +9613,7 @@
       </p:sp>
       <p:pic>
         <p:nvPicPr>
-          <p:cNvPr id="6" name="삽화:흐름_정기점검.svg" descr="illust_2351703321306601636_1791772944.png"/>
+          <p:cNvPr id="6" name="삽화:흐름_정기점검.svg" descr="illust_242103933492951144_1791772944.png"/>
           <p:cNvPicPr>
             <a:picLocks noChangeAspect="1"/>
           </p:cNvPicPr>
@@ -10302,7 +10302,7 @@
                 <a:ea typeface="맑은 고딕"/>
                 <a:cs typeface="맑은 고딕"/>
               </a:rPr>
-              <a:t>새로 그린 것</a:t>
+              <a:t>이 프로세스에서 달라진 요소</a:t>
             </a:r>
           </a:p>
           <a:p>
@@ -10427,7 +10427,7 @@
                 <a:ea typeface="맑은 고딕"/>
                 <a:cs typeface="맑은 고딕"/>
               </a:rPr>
-              <a:t>재고 보충 프로세스도 같은 승인 블록 뒤에 발주, 입고와 재고 반영, 결과 보고의 세 작업을 이어 작업 일곱으로 완성된다.</a:t>
+              <a:t>재고 보충 프로세스도 승인 블록은 같고, 그 뒤에 발주, 입고와 재고 반영, 결과 보고의 세 작업이 이어져 작업이 일곱이다.</a:t>
             </a:r>
           </a:p>
         </p:txBody>
@@ -10502,7 +10502,7 @@
       </p:sp>
       <p:pic>
         <p:nvPicPr>
-          <p:cNvPr id="6" name="삽화:흐름_재고보충.svg" descr="illust_8412877352476810512_1791772944.png"/>
+          <p:cNvPr id="6" name="삽화:흐름_재고보충.svg" descr="illust_2314991190981568228_1791772944.png"/>
           <p:cNvPicPr>
             <a:picLocks noChangeAspect="1"/>
           </p:cNvPicPr>
@@ -25083,7 +25083,7 @@
       </p:sp>
       <p:pic>
         <p:nvPicPr>
-          <p:cNvPr id="6" name="삽화:요소_복습.svg" descr="illust_690560068654882871_1791772944.png"/>
+          <p:cNvPr id="6" name="삽화:요소_복습.svg" descr="illust_8380326560679001216_1791772944.png"/>
           <p:cNvPicPr>
             <a:picLocks noChangeAspect="1"/>
           </p:cNvPicPr>
@@ -25909,7 +25909,7 @@
       </p:sp>
       <p:pic>
         <p:nvPicPr>
-          <p:cNvPr id="6" name="삽화:다섯자리.svg" descr="illust_6130152366728270621_1791772944.png"/>
+          <p:cNvPr id="6" name="삽화:다섯자리.svg" descr="illust_2845212476560706117_1791772944.png"/>
           <p:cNvPicPr>
             <a:picLocks noChangeAspect="1"/>
           </p:cNvPicPr>
@@ -26504,7 +26504,7 @@
       </p:sp>
       <p:pic>
         <p:nvPicPr>
-          <p:cNvPr id="6" name="삽화:주고받는것.svg" descr="illust_4704347752171512838_1791772944.png"/>
+          <p:cNvPr id="6" name="삽화:주고받는것.svg" descr="illust_7096288972246266198_1791772944.png"/>
           <p:cNvPicPr>
             <a:picLocks noChangeAspect="1"/>
           </p:cNvPicPr>
@@ -32210,7 +32210,7 @@
       </p:sp>
       <p:pic>
         <p:nvPicPr>
-          <p:cNvPr id="6" name="삽화:세종료.svg" descr="illust_8467281102102632270_1791772944.png"/>
+          <p:cNvPr id="6" name="삽화:세종료.svg" descr="illust_1191060432249054937_1791772944.png"/>
           <p:cNvPicPr>
             <a:picLocks noChangeAspect="1"/>
           </p:cNvPicPr>
@@ -33849,7 +33849,7 @@
       </p:sp>
       <p:pic>
         <p:nvPicPr>
-          <p:cNvPr id="6" name="삽화:세층연결.svg" descr="illust_2801936107130908534_1791772944.png"/>
+          <p:cNvPr id="6" name="삽화:세층연결.svg" descr="illust_3578707974546578260_1791772944.png"/>
           <p:cNvPicPr>
             <a:picLocks noChangeAspect="1"/>
           </p:cNvPicPr>
@@ -42091,7 +42091,7 @@
       </p:sp>
       <p:pic>
         <p:nvPicPr>
-          <p:cNvPr id="6" name="삽화:세시작.svg" descr="illust_6412567775465709734_1791772944.png"/>
+          <p:cNvPr id="6" name="삽화:세시작.svg" descr="illust_3232203926219347394_1791772944.png"/>
           <p:cNvPicPr>
             <a:picLocks noChangeAspect="1"/>
           </p:cNvPicPr>
@@ -47403,7 +47403,7 @@
       </p:sp>
       <p:pic>
         <p:nvPicPr>
-          <p:cNvPr id="6" name="삽화:운전시간.svg" descr="illust_7966131781677155841_1791772944.png"/>
+          <p:cNvPr id="6" name="삽화:운전시간.svg" descr="illust_2363693441319084435_1791772944.png"/>
           <p:cNvPicPr>
             <a:picLocks noChangeAspect="1"/>
           </p:cNvPicPr>
@@ -47914,7 +47914,7 @@
       </p:sp>
       <p:pic>
         <p:nvPicPr>
-          <p:cNvPr id="6" name="삽화:재고.svg" descr="illust_6510342808224526697_1791772944.png"/>
+          <p:cNvPr id="6" name="삽화:재고.svg" descr="illust_5823964790977250023_1791772944.png"/>
           <p:cNvPicPr>
             <a:picLocks noChangeAspect="1"/>
           </p:cNvPicPr>
